--- a/examples/word/tables.pptx
+++ b/examples/word/tables.pptx
@@ -5,9 +5,9 @@
     <p:sldMasterId xmlns:r="http://schemas.openxmlformats.org/officeDocument/2006/relationships" id="2147483648" r:id="rId1"/>
   </p:sldMasterIdLst>
   <p:sldIdLst>
-    <p:sldId id="256" r:id="R1fa0dce385af4c38"/>
-    <p:sldId id="257" r:id="R3be0a1316793400b"/>
-    <p:sldId id="258" r:id="Rf9befd2829434d31"/>
+    <p:sldId id="256" r:id="R8183b95c29ca4fe3"/>
+    <p:sldId id="257" r:id="R1d7de1ec8d2e4eed"/>
+    <p:sldId id="258" r:id="R5190806e47e14f74"/>
   </p:sldIdLst>
   <p:sldSz cx="12192000" cy="6858000"/>
   <p:notesSz cx="6858000" cy="9144000"/>
